--- a/assets/TCS349/Unit-2/Lecture4-5_Accountability_Governance.pptx
+++ b/assets/TCS349/Unit-2/Lecture4-5_Accountability_Governance.pptx
@@ -1989,6 +1989,28 @@
               <a:buNone/>
             </a:pPr>
             <a:r>
+              <a:rPr lang="en-US" dirty="0">
+                <a:solidFill>
+                  <a:srgbClr val="191919"/>
+                </a:solidFill>
+                <a:latin typeface="Times New Roman" pitchFamily="34" charset="0"/>
+                <a:ea typeface="Times New Roman" pitchFamily="34" charset="-122"/>
+                <a:cs typeface="Times New Roman" pitchFamily="34" charset="-120"/>
+              </a:rPr>
+              <a:t>M</a:t>
+            </a:r>
+            <a:r>
+              <a:rPr lang="en-US" sz="1800">
+                <a:solidFill>
+                  <a:srgbClr val="191919"/>
+                </a:solidFill>
+                <a:latin typeface="Times New Roman" pitchFamily="34" charset="0"/>
+                <a:ea typeface="Times New Roman" pitchFamily="34" charset="-122"/>
+                <a:cs typeface="Times New Roman" pitchFamily="34" charset="-120"/>
+              </a:rPr>
+              <a:t>r</a:t>
+            </a:r>
+            <a:r>
               <a:rPr lang="en-US" sz="1800" dirty="0">
                 <a:solidFill>
                   <a:srgbClr val="191919"/>
@@ -1997,7 +2019,7 @@
                 <a:ea typeface="Times New Roman" pitchFamily="34" charset="-122"/>
                 <a:cs typeface="Times New Roman" pitchFamily="34" charset="-120"/>
               </a:rPr>
-              <a:t>Dr. Manoj Kaushik</a:t>
+              <a:t>. Manoj Kaushik</a:t>
             </a:r>
             <a:endParaRPr lang="en-US" sz="1800" dirty="0"/>
           </a:p>
